--- a/LC UNIX/08 awk.pptx
+++ b/LC UNIX/08 awk.pptx
@@ -142,228 +142,38 @@
 <file path=ppt/changesInfos/changesInfo1.xml><?xml version="1.0" encoding="utf-8"?>
 <pc:chgInfo xmlns:a="http://schemas.openxmlformats.org/drawingml/2006/main" xmlns:r="http://schemas.openxmlformats.org/officeDocument/2006/relationships" xmlns:ac="http://schemas.microsoft.com/office/drawing/2013/main/command" xmlns:pc="http://schemas.microsoft.com/office/powerpoint/2013/main/command">
   <pc:docChgLst>
-    <pc:chgData name="Baráth, Július" userId="S::julius.barath@aos.sk::aebde9b9-dccc-4475-a9ac-c05e78323d7a" providerId="AD" clId="Web-{666140E3-6F75-6E0E-E8EC-C979EA12B981}"/>
+    <pc:chgData name="Baráth, Július" userId="aebde9b9-dccc-4475-a9ac-c05e78323d7a" providerId="ADAL" clId="{4A0811C8-ED2F-505E-B787-C8270CED5046}"/>
     <pc:docChg chg="modSld">
-      <pc:chgData name="Baráth, Július" userId="S::julius.barath@aos.sk::aebde9b9-dccc-4475-a9ac-c05e78323d7a" providerId="AD" clId="Web-{666140E3-6F75-6E0E-E8EC-C979EA12B981}" dt="2023-12-18T12:55:42.206" v="230" actId="14100"/>
-      <pc:docMkLst>
-        <pc:docMk/>
-      </pc:docMkLst>
-      <pc:sldChg chg="modSp">
-        <pc:chgData name="Baráth, Július" userId="S::julius.barath@aos.sk::aebde9b9-dccc-4475-a9ac-c05e78323d7a" providerId="AD" clId="Web-{666140E3-6F75-6E0E-E8EC-C979EA12B981}" dt="2023-12-18T12:17:57.148" v="1" actId="20577"/>
-        <pc:sldMkLst>
-          <pc:docMk/>
-          <pc:sldMk cId="0" sldId="259"/>
-        </pc:sldMkLst>
-      </pc:sldChg>
-      <pc:sldChg chg="modSp">
-        <pc:chgData name="Baráth, Július" userId="S::julius.barath@aos.sk::aebde9b9-dccc-4475-a9ac-c05e78323d7a" providerId="AD" clId="Web-{666140E3-6F75-6E0E-E8EC-C979EA12B981}" dt="2023-12-18T12:36:35.583" v="97" actId="20577"/>
-        <pc:sldMkLst>
-          <pc:docMk/>
-          <pc:sldMk cId="0" sldId="260"/>
-        </pc:sldMkLst>
-      </pc:sldChg>
-      <pc:sldChg chg="modSp">
-        <pc:chgData name="Baráth, Július" userId="S::julius.barath@aos.sk::aebde9b9-dccc-4475-a9ac-c05e78323d7a" providerId="AD" clId="Web-{666140E3-6F75-6E0E-E8EC-C979EA12B981}" dt="2023-12-18T12:35:47.191" v="83" actId="20577"/>
-        <pc:sldMkLst>
-          <pc:docMk/>
-          <pc:sldMk cId="0" sldId="261"/>
-        </pc:sldMkLst>
-      </pc:sldChg>
-      <pc:sldChg chg="addSp modSp">
-        <pc:chgData name="Baráth, Július" userId="S::julius.barath@aos.sk::aebde9b9-dccc-4475-a9ac-c05e78323d7a" providerId="AD" clId="Web-{666140E3-6F75-6E0E-E8EC-C979EA12B981}" dt="2023-12-18T12:37:00.958" v="99" actId="20577"/>
-        <pc:sldMkLst>
-          <pc:docMk/>
-          <pc:sldMk cId="0" sldId="262"/>
-        </pc:sldMkLst>
-      </pc:sldChg>
-      <pc:sldChg chg="addSp modSp">
-        <pc:chgData name="Baráth, Július" userId="S::julius.barath@aos.sk::aebde9b9-dccc-4475-a9ac-c05e78323d7a" providerId="AD" clId="Web-{666140E3-6F75-6E0E-E8EC-C979EA12B981}" dt="2023-12-18T12:42:08.232" v="133" actId="1076"/>
-        <pc:sldMkLst>
-          <pc:docMk/>
-          <pc:sldMk cId="0" sldId="263"/>
-        </pc:sldMkLst>
-      </pc:sldChg>
-      <pc:sldChg chg="addSp modSp">
-        <pc:chgData name="Baráth, Július" userId="S::julius.barath@aos.sk::aebde9b9-dccc-4475-a9ac-c05e78323d7a" providerId="AD" clId="Web-{666140E3-6F75-6E0E-E8EC-C979EA12B981}" dt="2023-12-18T12:41:01.214" v="127" actId="14100"/>
-        <pc:sldMkLst>
-          <pc:docMk/>
-          <pc:sldMk cId="0" sldId="264"/>
-        </pc:sldMkLst>
-      </pc:sldChg>
-      <pc:sldChg chg="addSp modSp">
-        <pc:chgData name="Baráth, Július" userId="S::julius.barath@aos.sk::aebde9b9-dccc-4475-a9ac-c05e78323d7a" providerId="AD" clId="Web-{666140E3-6F75-6E0E-E8EC-C979EA12B981}" dt="2023-12-18T12:46:59.661" v="167" actId="1076"/>
-        <pc:sldMkLst>
-          <pc:docMk/>
-          <pc:sldMk cId="0" sldId="265"/>
-        </pc:sldMkLst>
-      </pc:sldChg>
-      <pc:sldChg chg="addSp modSp">
-        <pc:chgData name="Baráth, Július" userId="S::julius.barath@aos.sk::aebde9b9-dccc-4475-a9ac-c05e78323d7a" providerId="AD" clId="Web-{666140E3-6F75-6E0E-E8EC-C979EA12B981}" dt="2023-12-18T12:50:07.650" v="202" actId="14100"/>
-        <pc:sldMkLst>
-          <pc:docMk/>
-          <pc:sldMk cId="0" sldId="266"/>
-        </pc:sldMkLst>
-      </pc:sldChg>
-      <pc:sldChg chg="addSp modSp">
-        <pc:chgData name="Baráth, Július" userId="S::julius.barath@aos.sk::aebde9b9-dccc-4475-a9ac-c05e78323d7a" providerId="AD" clId="Web-{666140E3-6F75-6E0E-E8EC-C979EA12B981}" dt="2023-12-18T12:55:42.206" v="230" actId="14100"/>
-        <pc:sldMkLst>
-          <pc:docMk/>
-          <pc:sldMk cId="0" sldId="271"/>
-        </pc:sldMkLst>
-      </pc:sldChg>
-    </pc:docChg>
-  </pc:docChgLst>
-  <pc:docChgLst>
-    <pc:chgData name="Baráth, Július" userId="aebde9b9-dccc-4475-a9ac-c05e78323d7a" providerId="ADAL" clId="{C72ECC88-2D75-574C-A9B8-806A5D0930D2}"/>
-    <pc:docChg chg="undo custSel addSld delSld modSld">
-      <pc:chgData name="Baráth, Július" userId="aebde9b9-dccc-4475-a9ac-c05e78323d7a" providerId="ADAL" clId="{C72ECC88-2D75-574C-A9B8-806A5D0930D2}" dt="2024-03-19T13:05:35.096" v="152" actId="20577"/>
+      <pc:chgData name="Baráth, Július" userId="aebde9b9-dccc-4475-a9ac-c05e78323d7a" providerId="ADAL" clId="{4A0811C8-ED2F-505E-B787-C8270CED5046}" dt="2026-03-12T06:13:35.801" v="2" actId="20577"/>
       <pc:docMkLst>
         <pc:docMk/>
       </pc:docMkLst>
       <pc:sldChg chg="modSp mod">
-        <pc:chgData name="Baráth, Július" userId="aebde9b9-dccc-4475-a9ac-c05e78323d7a" providerId="ADAL" clId="{C72ECC88-2D75-574C-A9B8-806A5D0930D2}" dt="2024-03-19T12:55:29.234" v="117" actId="27636"/>
+        <pc:chgData name="Baráth, Július" userId="aebde9b9-dccc-4475-a9ac-c05e78323d7a" providerId="ADAL" clId="{4A0811C8-ED2F-505E-B787-C8270CED5046}" dt="2026-03-12T06:10:59.755" v="0" actId="113"/>
         <pc:sldMkLst>
           <pc:docMk/>
           <pc:sldMk cId="0" sldId="257"/>
         </pc:sldMkLst>
-      </pc:sldChg>
-      <pc:sldChg chg="modSp mod">
-        <pc:chgData name="Baráth, Július" userId="aebde9b9-dccc-4475-a9ac-c05e78323d7a" providerId="ADAL" clId="{C72ECC88-2D75-574C-A9B8-806A5D0930D2}" dt="2024-03-18T12:38:29.565" v="1" actId="20577"/>
-        <pc:sldMkLst>
-          <pc:docMk/>
-          <pc:sldMk cId="0" sldId="259"/>
-        </pc:sldMkLst>
-      </pc:sldChg>
-      <pc:sldChg chg="modSp mod">
-        <pc:chgData name="Baráth, Július" userId="aebde9b9-dccc-4475-a9ac-c05e78323d7a" providerId="ADAL" clId="{C72ECC88-2D75-574C-A9B8-806A5D0930D2}" dt="2024-03-18T13:43:49.180" v="17" actId="20577"/>
-        <pc:sldMkLst>
-          <pc:docMk/>
-          <pc:sldMk cId="0" sldId="260"/>
-        </pc:sldMkLst>
-      </pc:sldChg>
-      <pc:sldChg chg="modSp mod">
-        <pc:chgData name="Baráth, Július" userId="aebde9b9-dccc-4475-a9ac-c05e78323d7a" providerId="ADAL" clId="{C72ECC88-2D75-574C-A9B8-806A5D0930D2}" dt="2024-03-19T13:05:35.096" v="152" actId="20577"/>
-        <pc:sldMkLst>
-          <pc:docMk/>
-          <pc:sldMk cId="0" sldId="261"/>
-        </pc:sldMkLst>
-      </pc:sldChg>
-      <pc:sldChg chg="addSp modSp mod modClrScheme chgLayout">
-        <pc:chgData name="Baráth, Július" userId="aebde9b9-dccc-4475-a9ac-c05e78323d7a" providerId="ADAL" clId="{C72ECC88-2D75-574C-A9B8-806A5D0930D2}" dt="2024-03-19T12:56:13.912" v="127" actId="20577"/>
-        <pc:sldMkLst>
-          <pc:docMk/>
-          <pc:sldMk cId="0" sldId="267"/>
-        </pc:sldMkLst>
-      </pc:sldChg>
-      <pc:sldChg chg="new del">
-        <pc:chgData name="Baráth, Július" userId="aebde9b9-dccc-4475-a9ac-c05e78323d7a" providerId="ADAL" clId="{C72ECC88-2D75-574C-A9B8-806A5D0930D2}" dt="2024-03-19T12:55:57.809" v="121" actId="680"/>
-        <pc:sldMkLst>
-          <pc:docMk/>
-          <pc:sldMk cId="1769099286" sldId="272"/>
-        </pc:sldMkLst>
-      </pc:sldChg>
-    </pc:docChg>
-  </pc:docChgLst>
-  <pc:docChgLst>
-    <pc:chgData name="Baráth, Július" userId="aebde9b9-dccc-4475-a9ac-c05e78323d7a" providerId="ADAL" clId="{385F3312-4CB8-AB4A-80AE-AD848B0264A0}"/>
-    <pc:docChg chg="custSel addSld modSld">
-      <pc:chgData name="Baráth, Július" userId="aebde9b9-dccc-4475-a9ac-c05e78323d7a" providerId="ADAL" clId="{385F3312-4CB8-AB4A-80AE-AD848B0264A0}" dt="2023-03-30T05:34:45.206" v="45" actId="108"/>
-      <pc:docMkLst>
-        <pc:docMk/>
-      </pc:docMkLst>
-      <pc:sldChg chg="modSp mod">
-        <pc:chgData name="Baráth, Július" userId="aebde9b9-dccc-4475-a9ac-c05e78323d7a" providerId="ADAL" clId="{385F3312-4CB8-AB4A-80AE-AD848B0264A0}" dt="2023-03-30T05:25:39.561" v="30" actId="20577"/>
-        <pc:sldMkLst>
-          <pc:docMk/>
-          <pc:sldMk cId="0" sldId="260"/>
-        </pc:sldMkLst>
-      </pc:sldChg>
-      <pc:sldChg chg="delSp modSp add mod setBg">
-        <pc:chgData name="Baráth, Július" userId="aebde9b9-dccc-4475-a9ac-c05e78323d7a" providerId="ADAL" clId="{385F3312-4CB8-AB4A-80AE-AD848B0264A0}" dt="2023-03-30T05:24:01.126" v="7" actId="12"/>
-        <pc:sldMkLst>
-          <pc:docMk/>
-          <pc:sldMk cId="0" sldId="267"/>
-        </pc:sldMkLst>
-      </pc:sldChg>
-      <pc:sldChg chg="delSp modSp add mod setBg">
-        <pc:chgData name="Baráth, Július" userId="aebde9b9-dccc-4475-a9ac-c05e78323d7a" providerId="ADAL" clId="{385F3312-4CB8-AB4A-80AE-AD848B0264A0}" dt="2023-03-30T05:27:03.447" v="33" actId="14100"/>
-        <pc:sldMkLst>
-          <pc:docMk/>
-          <pc:sldMk cId="0" sldId="270"/>
-        </pc:sldMkLst>
-      </pc:sldChg>
-      <pc:sldChg chg="delSp modSp add mod setBg">
-        <pc:chgData name="Baráth, Július" userId="aebde9b9-dccc-4475-a9ac-c05e78323d7a" providerId="ADAL" clId="{385F3312-4CB8-AB4A-80AE-AD848B0264A0}" dt="2023-03-30T05:34:45.206" v="45" actId="108"/>
-        <pc:sldMkLst>
-          <pc:docMk/>
-          <pc:sldMk cId="0" sldId="271"/>
-        </pc:sldMkLst>
-      </pc:sldChg>
-    </pc:docChg>
-  </pc:docChgLst>
-  <pc:docChgLst>
-    <pc:chgData name="Baráth, Július" userId="aebde9b9-dccc-4475-a9ac-c05e78323d7a" providerId="ADAL" clId="{55A80219-5596-A441-A634-E3593B12C1F6}"/>
-    <pc:docChg chg="custSel modSld">
-      <pc:chgData name="Baráth, Július" userId="aebde9b9-dccc-4475-a9ac-c05e78323d7a" providerId="ADAL" clId="{55A80219-5596-A441-A634-E3593B12C1F6}" dt="2025-04-01T06:51:28.890" v="18"/>
-      <pc:docMkLst>
-        <pc:docMk/>
-      </pc:docMkLst>
-      <pc:sldChg chg="modSp mod">
-        <pc:chgData name="Baráth, Július" userId="aebde9b9-dccc-4475-a9ac-c05e78323d7a" providerId="ADAL" clId="{55A80219-5596-A441-A634-E3593B12C1F6}" dt="2025-03-28T09:50:35.666" v="13" actId="108"/>
-        <pc:sldMkLst>
-          <pc:docMk/>
-          <pc:sldMk cId="0" sldId="260"/>
-        </pc:sldMkLst>
         <pc:spChg chg="mod">
-          <ac:chgData name="Baráth, Július" userId="aebde9b9-dccc-4475-a9ac-c05e78323d7a" providerId="ADAL" clId="{55A80219-5596-A441-A634-E3593B12C1F6}" dt="2025-03-28T09:50:35.666" v="13" actId="108"/>
+          <ac:chgData name="Baráth, Július" userId="aebde9b9-dccc-4475-a9ac-c05e78323d7a" providerId="ADAL" clId="{4A0811C8-ED2F-505E-B787-C8270CED5046}" dt="2026-03-12T06:10:59.755" v="0" actId="113"/>
           <ac:spMkLst>
             <pc:docMk/>
-            <pc:sldMk cId="0" sldId="260"/>
+            <pc:sldMk cId="0" sldId="257"/>
             <ac:spMk id="3" creationId="{00000000-0000-0000-0000-000000000000}"/>
           </ac:spMkLst>
         </pc:spChg>
       </pc:sldChg>
       <pc:sldChg chg="modSp mod">
-        <pc:chgData name="Baráth, Július" userId="aebde9b9-dccc-4475-a9ac-c05e78323d7a" providerId="ADAL" clId="{55A80219-5596-A441-A634-E3593B12C1F6}" dt="2025-04-01T06:49:32.945" v="17"/>
+        <pc:chgData name="Baráth, Július" userId="aebde9b9-dccc-4475-a9ac-c05e78323d7a" providerId="ADAL" clId="{4A0811C8-ED2F-505E-B787-C8270CED5046}" dt="2026-03-12T06:13:35.801" v="2" actId="20577"/>
         <pc:sldMkLst>
           <pc:docMk/>
-          <pc:sldMk cId="0" sldId="264"/>
+          <pc:sldMk cId="0" sldId="259"/>
         </pc:sldMkLst>
         <pc:spChg chg="mod">
-          <ac:chgData name="Baráth, Július" userId="aebde9b9-dccc-4475-a9ac-c05e78323d7a" providerId="ADAL" clId="{55A80219-5596-A441-A634-E3593B12C1F6}" dt="2025-04-01T06:49:32.945" v="17"/>
+          <ac:chgData name="Baráth, Július" userId="aebde9b9-dccc-4475-a9ac-c05e78323d7a" providerId="ADAL" clId="{4A0811C8-ED2F-505E-B787-C8270CED5046}" dt="2026-03-12T06:13:35.801" v="2" actId="20577"/>
           <ac:spMkLst>
             <pc:docMk/>
-            <pc:sldMk cId="0" sldId="264"/>
-            <ac:spMk id="3" creationId="{00000000-0000-0000-0000-000000000000}"/>
-          </ac:spMkLst>
-        </pc:spChg>
-      </pc:sldChg>
-      <pc:sldChg chg="modSp mod">
-        <pc:chgData name="Baráth, Július" userId="aebde9b9-dccc-4475-a9ac-c05e78323d7a" providerId="ADAL" clId="{55A80219-5596-A441-A634-E3593B12C1F6}" dt="2025-04-01T06:47:59.891" v="14"/>
-        <pc:sldMkLst>
-          <pc:docMk/>
-          <pc:sldMk cId="0" sldId="265"/>
-        </pc:sldMkLst>
-        <pc:spChg chg="mod">
-          <ac:chgData name="Baráth, Július" userId="aebde9b9-dccc-4475-a9ac-c05e78323d7a" providerId="ADAL" clId="{55A80219-5596-A441-A634-E3593B12C1F6}" dt="2025-04-01T06:47:59.891" v="14"/>
-          <ac:spMkLst>
-            <pc:docMk/>
-            <pc:sldMk cId="0" sldId="265"/>
-            <ac:spMk id="3" creationId="{00000000-0000-0000-0000-000000000000}"/>
-          </ac:spMkLst>
-        </pc:spChg>
-      </pc:sldChg>
-      <pc:sldChg chg="modSp mod">
-        <pc:chgData name="Baráth, Július" userId="aebde9b9-dccc-4475-a9ac-c05e78323d7a" providerId="ADAL" clId="{55A80219-5596-A441-A634-E3593B12C1F6}" dt="2025-04-01T06:51:28.890" v="18"/>
-        <pc:sldMkLst>
-          <pc:docMk/>
-          <pc:sldMk cId="0" sldId="266"/>
-        </pc:sldMkLst>
-        <pc:spChg chg="mod">
-          <ac:chgData name="Baráth, Július" userId="aebde9b9-dccc-4475-a9ac-c05e78323d7a" providerId="ADAL" clId="{55A80219-5596-A441-A634-E3593B12C1F6}" dt="2025-04-01T06:51:28.890" v="18"/>
-          <ac:spMkLst>
-            <pc:docMk/>
-            <pc:sldMk cId="0" sldId="266"/>
+            <pc:sldMk cId="0" sldId="259"/>
             <ac:spMk id="3" creationId="{00000000-0000-0000-0000-000000000000}"/>
           </ac:spMkLst>
         </pc:spChg>
@@ -455,7 +265,7 @@
           <a:p>
             <a:fld id="{701E67C6-56A4-4935-9E9B-5A79F4E75DED}" type="datetimeFigureOut">
               <a:rPr lang="sk-SK" smtClean="0"/>
-              <a:t>1.4.2025</a:t>
+              <a:t>12.3.2026</a:t>
             </a:fld>
             <a:endParaRPr lang="sk-SK"/>
           </a:p>
@@ -907,6 +717,90 @@
 </file>
 
 <file path=ppt/notesSlides/notesSlide3.xml><?xml version="1.0" encoding="utf-8"?>
+<p:notes xmlns:a="http://schemas.openxmlformats.org/drawingml/2006/main" xmlns:r="http://schemas.openxmlformats.org/officeDocument/2006/relationships" xmlns:p="http://schemas.openxmlformats.org/presentationml/2006/main">
+  <p:cSld>
+    <p:spTree>
+      <p:nvGrpSpPr>
+        <p:cNvPr id="1" name=""/>
+        <p:cNvGrpSpPr/>
+        <p:nvPr/>
+      </p:nvGrpSpPr>
+      <p:grpSpPr>
+        <a:xfrm>
+          <a:off x="0" y="0"/>
+          <a:ext cx="0" cy="0"/>
+          <a:chOff x="0" y="0"/>
+          <a:chExt cx="0" cy="0"/>
+        </a:xfrm>
+      </p:grpSpPr>
+      <p:sp>
+        <p:nvSpPr>
+          <p:cNvPr id="2" name="Zástupný objekt pre obrázok snímky 1"/>
+          <p:cNvSpPr>
+            <a:spLocks noGrp="1" noRot="1" noChangeAspect="1"/>
+          </p:cNvSpPr>
+          <p:nvPr>
+            <p:ph type="sldImg"/>
+          </p:nvPr>
+        </p:nvSpPr>
+        <p:spPr/>
+      </p:sp>
+      <p:sp>
+        <p:nvSpPr>
+          <p:cNvPr id="3" name="Zástupný objekt pre poznámky 2"/>
+          <p:cNvSpPr>
+            <a:spLocks noGrp="1"/>
+          </p:cNvSpPr>
+          <p:nvPr>
+            <p:ph type="body" idx="1"/>
+          </p:nvPr>
+        </p:nvSpPr>
+        <p:spPr/>
+        <p:txBody>
+          <a:bodyPr/>
+          <a:lstStyle/>
+          <a:p>
+            <a:endParaRPr lang="sk-SK" dirty="0"/>
+          </a:p>
+        </p:txBody>
+      </p:sp>
+      <p:sp>
+        <p:nvSpPr>
+          <p:cNvPr id="4" name="Zástupný objekt pre číslo snímky 3"/>
+          <p:cNvSpPr>
+            <a:spLocks noGrp="1"/>
+          </p:cNvSpPr>
+          <p:nvPr>
+            <p:ph type="sldNum" sz="quarter" idx="5"/>
+          </p:nvPr>
+        </p:nvSpPr>
+        <p:spPr/>
+        <p:txBody>
+          <a:bodyPr/>
+          <a:lstStyle/>
+          <a:p>
+            <a:fld id="{609FCE1F-0B2C-411E-8BB2-0B89545CC6B6}" type="slidenum">
+              <a:rPr lang="sk-SK" smtClean="0"/>
+              <a:t>4</a:t>
+            </a:fld>
+            <a:endParaRPr lang="sk-SK"/>
+          </a:p>
+        </p:txBody>
+      </p:sp>
+    </p:spTree>
+    <p:extLst>
+      <p:ext uri="{BB962C8B-B14F-4D97-AF65-F5344CB8AC3E}">
+        <p14:creationId xmlns:p14="http://schemas.microsoft.com/office/powerpoint/2010/main" val="1596218173"/>
+      </p:ext>
+    </p:extLst>
+  </p:cSld>
+  <p:clrMapOvr>
+    <a:masterClrMapping/>
+  </p:clrMapOvr>
+</p:notes>
+</file>
+
+<file path=ppt/notesSlides/notesSlide4.xml><?xml version="1.0" encoding="utf-8"?>
 <p:notes xmlns:a="http://schemas.openxmlformats.org/drawingml/2006/main" xmlns:r="http://schemas.openxmlformats.org/officeDocument/2006/relationships" xmlns:p="http://schemas.openxmlformats.org/presentationml/2006/main" showMasterSp="0" showMasterPhAnim="0">
   <p:cSld>
     <p:spTree>
@@ -1006,7 +900,7 @@
 </p:notes>
 </file>
 
-<file path=ppt/notesSlides/notesSlide4.xml><?xml version="1.0" encoding="utf-8"?>
+<file path=ppt/notesSlides/notesSlide5.xml><?xml version="1.0" encoding="utf-8"?>
 <p:notes xmlns:a="http://schemas.openxmlformats.org/drawingml/2006/main" xmlns:r="http://schemas.openxmlformats.org/officeDocument/2006/relationships" xmlns:p="http://schemas.openxmlformats.org/presentationml/2006/main" showMasterSp="0" showMasterPhAnim="0">
   <p:cSld>
     <p:spTree>
@@ -1285,7 +1179,7 @@
           <a:p>
             <a:fld id="{E33214CC-5E63-4C66-809C-6D4931786226}" type="datetimeFigureOut">
               <a:rPr lang="sk-SK" smtClean="0"/>
-              <a:t>1.4.2025</a:t>
+              <a:t>12.3.2026</a:t>
             </a:fld>
             <a:endParaRPr lang="sk-SK"/>
           </a:p>
@@ -1448,7 +1342,7 @@
           <a:p>
             <a:fld id="{E33214CC-5E63-4C66-809C-6D4931786226}" type="datetimeFigureOut">
               <a:rPr lang="sk-SK" smtClean="0"/>
-              <a:t>1.4.2025</a:t>
+              <a:t>12.3.2026</a:t>
             </a:fld>
             <a:endParaRPr lang="sk-SK"/>
           </a:p>
@@ -1621,7 +1515,7 @@
           <a:p>
             <a:fld id="{E33214CC-5E63-4C66-809C-6D4931786226}" type="datetimeFigureOut">
               <a:rPr lang="sk-SK" smtClean="0"/>
-              <a:t>1.4.2025</a:t>
+              <a:t>12.3.2026</a:t>
             </a:fld>
             <a:endParaRPr lang="sk-SK"/>
           </a:p>
@@ -1784,7 +1678,7 @@
           <a:p>
             <a:fld id="{E33214CC-5E63-4C66-809C-6D4931786226}" type="datetimeFigureOut">
               <a:rPr lang="sk-SK" smtClean="0"/>
-              <a:t>1.4.2025</a:t>
+              <a:t>12.3.2026</a:t>
             </a:fld>
             <a:endParaRPr lang="sk-SK"/>
           </a:p>
@@ -2024,7 +1918,7 @@
           <a:p>
             <a:fld id="{E33214CC-5E63-4C66-809C-6D4931786226}" type="datetimeFigureOut">
               <a:rPr lang="sk-SK" smtClean="0"/>
-              <a:t>1.4.2025</a:t>
+              <a:t>12.3.2026</a:t>
             </a:fld>
             <a:endParaRPr lang="sk-SK"/>
           </a:p>
@@ -2304,7 +2198,7 @@
           <a:p>
             <a:fld id="{E33214CC-5E63-4C66-809C-6D4931786226}" type="datetimeFigureOut">
               <a:rPr lang="sk-SK" smtClean="0"/>
-              <a:t>1.4.2025</a:t>
+              <a:t>12.3.2026</a:t>
             </a:fld>
             <a:endParaRPr lang="sk-SK"/>
           </a:p>
@@ -2718,7 +2612,7 @@
           <a:p>
             <a:fld id="{E33214CC-5E63-4C66-809C-6D4931786226}" type="datetimeFigureOut">
               <a:rPr lang="sk-SK" smtClean="0"/>
-              <a:t>1.4.2025</a:t>
+              <a:t>12.3.2026</a:t>
             </a:fld>
             <a:endParaRPr lang="sk-SK"/>
           </a:p>
@@ -2830,7 +2724,7 @@
           <a:p>
             <a:fld id="{E33214CC-5E63-4C66-809C-6D4931786226}" type="datetimeFigureOut">
               <a:rPr lang="sk-SK" smtClean="0"/>
-              <a:t>1.4.2025</a:t>
+              <a:t>12.3.2026</a:t>
             </a:fld>
             <a:endParaRPr lang="sk-SK"/>
           </a:p>
@@ -2920,7 +2814,7 @@
           <a:p>
             <a:fld id="{E33214CC-5E63-4C66-809C-6D4931786226}" type="datetimeFigureOut">
               <a:rPr lang="sk-SK" smtClean="0"/>
-              <a:t>1.4.2025</a:t>
+              <a:t>12.3.2026</a:t>
             </a:fld>
             <a:endParaRPr lang="sk-SK"/>
           </a:p>
@@ -3190,7 +3084,7 @@
           <a:p>
             <a:fld id="{E33214CC-5E63-4C66-809C-6D4931786226}" type="datetimeFigureOut">
               <a:rPr lang="sk-SK" smtClean="0"/>
-              <a:t>1.4.2025</a:t>
+              <a:t>12.3.2026</a:t>
             </a:fld>
             <a:endParaRPr lang="sk-SK"/>
           </a:p>
@@ -3437,7 +3331,7 @@
           <a:p>
             <a:fld id="{E33214CC-5E63-4C66-809C-6D4931786226}" type="datetimeFigureOut">
               <a:rPr lang="sk-SK" smtClean="0"/>
-              <a:t>1.4.2025</a:t>
+              <a:t>12.3.2026</a:t>
             </a:fld>
             <a:endParaRPr lang="sk-SK"/>
           </a:p>
@@ -3643,7 +3537,7 @@
           <a:p>
             <a:fld id="{E33214CC-5E63-4C66-809C-6D4931786226}" type="datetimeFigureOut">
               <a:rPr lang="sk-SK" smtClean="0"/>
-              <a:t>1.4.2025</a:t>
+              <a:t>12.3.2026</a:t>
             </a:fld>
             <a:endParaRPr lang="sk-SK"/>
           </a:p>
@@ -6889,7 +6783,7 @@
               <a:t> </a:t>
             </a:r>
             <a:r>
-              <a:rPr lang="sk-SK" b="0" i="0" dirty="0" err="1">
+              <a:rPr lang="sk-SK" b="1" i="0" dirty="0" err="1">
                 <a:solidFill>
                   <a:srgbClr val="273239"/>
                 </a:solidFill>
@@ -6902,6 +6796,123 @@
               <a:t>used</a:t>
             </a:r>
             <a:r>
+              <a:rPr lang="sk-SK" b="1" i="0" dirty="0">
+                <a:solidFill>
+                  <a:srgbClr val="273239"/>
+                </a:solidFill>
+                <a:effectLst/>
+                <a:highlight>
+                  <a:srgbClr val="FFFFFF"/>
+                </a:highlight>
+                <a:latin typeface="Nunito" pitchFamily="2" charset="0"/>
+              </a:rPr>
+              <a:t> </a:t>
+            </a:r>
+            <a:r>
+              <a:rPr lang="sk-SK" b="1" i="0" dirty="0" err="1">
+                <a:solidFill>
+                  <a:srgbClr val="273239"/>
+                </a:solidFill>
+                <a:effectLst/>
+                <a:highlight>
+                  <a:srgbClr val="FFFFFF"/>
+                </a:highlight>
+                <a:latin typeface="Nunito" pitchFamily="2" charset="0"/>
+              </a:rPr>
+              <a:t>for</a:t>
+            </a:r>
+            <a:r>
+              <a:rPr lang="sk-SK" b="1" i="0" dirty="0">
+                <a:solidFill>
+                  <a:srgbClr val="273239"/>
+                </a:solidFill>
+                <a:effectLst/>
+                <a:highlight>
+                  <a:srgbClr val="FFFFFF"/>
+                </a:highlight>
+                <a:latin typeface="Nunito" pitchFamily="2" charset="0"/>
+              </a:rPr>
+              <a:t> </a:t>
+            </a:r>
+            <a:r>
+              <a:rPr lang="sk-SK" b="1" i="0" dirty="0" err="1">
+                <a:solidFill>
+                  <a:srgbClr val="273239"/>
+                </a:solidFill>
+                <a:effectLst/>
+                <a:highlight>
+                  <a:srgbClr val="FFFFFF"/>
+                </a:highlight>
+                <a:latin typeface="Nunito" pitchFamily="2" charset="0"/>
+              </a:rPr>
+              <a:t>pattern</a:t>
+            </a:r>
+            <a:r>
+              <a:rPr lang="sk-SK" b="1" i="0" dirty="0">
+                <a:solidFill>
+                  <a:srgbClr val="273239"/>
+                </a:solidFill>
+                <a:effectLst/>
+                <a:highlight>
+                  <a:srgbClr val="FFFFFF"/>
+                </a:highlight>
+                <a:latin typeface="Nunito" pitchFamily="2" charset="0"/>
+              </a:rPr>
+              <a:t> </a:t>
+            </a:r>
+            <a:r>
+              <a:rPr lang="sk-SK" b="1" i="0" dirty="0" err="1">
+                <a:solidFill>
+                  <a:srgbClr val="273239"/>
+                </a:solidFill>
+                <a:effectLst/>
+                <a:highlight>
+                  <a:srgbClr val="FFFFFF"/>
+                </a:highlight>
+                <a:latin typeface="Nunito" pitchFamily="2" charset="0"/>
+              </a:rPr>
+              <a:t>scanning</a:t>
+            </a:r>
+            <a:r>
+              <a:rPr lang="sk-SK" b="1" i="0" dirty="0">
+                <a:solidFill>
+                  <a:srgbClr val="273239"/>
+                </a:solidFill>
+                <a:effectLst/>
+                <a:highlight>
+                  <a:srgbClr val="FFFFFF"/>
+                </a:highlight>
+                <a:latin typeface="Nunito" pitchFamily="2" charset="0"/>
+              </a:rPr>
+              <a:t> and </a:t>
+            </a:r>
+            <a:r>
+              <a:rPr lang="sk-SK" b="1" i="0" dirty="0" err="1">
+                <a:solidFill>
+                  <a:srgbClr val="273239"/>
+                </a:solidFill>
+                <a:effectLst/>
+                <a:highlight>
+                  <a:srgbClr val="FFFFFF"/>
+                </a:highlight>
+                <a:latin typeface="Nunito" pitchFamily="2" charset="0"/>
+              </a:rPr>
+              <a:t>processing</a:t>
+            </a:r>
+            <a:r>
+              <a:rPr lang="sk-SK" b="1" i="0" dirty="0">
+                <a:solidFill>
+                  <a:srgbClr val="273239"/>
+                </a:solidFill>
+                <a:effectLst/>
+                <a:highlight>
+                  <a:srgbClr val="FFFFFF"/>
+                </a:highlight>
+                <a:latin typeface="Nunito" pitchFamily="2" charset="0"/>
+              </a:rPr>
+              <a:t>.</a:t>
+            </a:r>
+            <a:r>
               <a:rPr lang="sk-SK" b="0" i="0" dirty="0">
                 <a:solidFill>
                   <a:srgbClr val="273239"/>
@@ -6913,110 +6924,6 @@
                 <a:latin typeface="Nunito" pitchFamily="2" charset="0"/>
               </a:rPr>
               <a:t> </a:t>
-            </a:r>
-            <a:r>
-              <a:rPr lang="sk-SK" b="0" i="0" dirty="0" err="1">
-                <a:solidFill>
-                  <a:srgbClr val="273239"/>
-                </a:solidFill>
-                <a:effectLst/>
-                <a:highlight>
-                  <a:srgbClr val="FFFFFF"/>
-                </a:highlight>
-                <a:latin typeface="Nunito" pitchFamily="2" charset="0"/>
-              </a:rPr>
-              <a:t>for</a:t>
-            </a:r>
-            <a:r>
-              <a:rPr lang="sk-SK" b="0" i="0" dirty="0">
-                <a:solidFill>
-                  <a:srgbClr val="273239"/>
-                </a:solidFill>
-                <a:effectLst/>
-                <a:highlight>
-                  <a:srgbClr val="FFFFFF"/>
-                </a:highlight>
-                <a:latin typeface="Nunito" pitchFamily="2" charset="0"/>
-              </a:rPr>
-              <a:t> </a:t>
-            </a:r>
-            <a:r>
-              <a:rPr lang="sk-SK" b="0" i="0" dirty="0" err="1">
-                <a:solidFill>
-                  <a:srgbClr val="273239"/>
-                </a:solidFill>
-                <a:effectLst/>
-                <a:highlight>
-                  <a:srgbClr val="FFFFFF"/>
-                </a:highlight>
-                <a:latin typeface="Nunito" pitchFamily="2" charset="0"/>
-              </a:rPr>
-              <a:t>pattern</a:t>
-            </a:r>
-            <a:r>
-              <a:rPr lang="sk-SK" b="0" i="0" dirty="0">
-                <a:solidFill>
-                  <a:srgbClr val="273239"/>
-                </a:solidFill>
-                <a:effectLst/>
-                <a:highlight>
-                  <a:srgbClr val="FFFFFF"/>
-                </a:highlight>
-                <a:latin typeface="Nunito" pitchFamily="2" charset="0"/>
-              </a:rPr>
-              <a:t> </a:t>
-            </a:r>
-            <a:r>
-              <a:rPr lang="sk-SK" b="0" i="0" dirty="0" err="1">
-                <a:solidFill>
-                  <a:srgbClr val="273239"/>
-                </a:solidFill>
-                <a:effectLst/>
-                <a:highlight>
-                  <a:srgbClr val="FFFFFF"/>
-                </a:highlight>
-                <a:latin typeface="Nunito" pitchFamily="2" charset="0"/>
-              </a:rPr>
-              <a:t>scanning</a:t>
-            </a:r>
-            <a:r>
-              <a:rPr lang="sk-SK" b="0" i="0" dirty="0">
-                <a:solidFill>
-                  <a:srgbClr val="273239"/>
-                </a:solidFill>
-                <a:effectLst/>
-                <a:highlight>
-                  <a:srgbClr val="FFFFFF"/>
-                </a:highlight>
-                <a:latin typeface="Nunito" pitchFamily="2" charset="0"/>
-              </a:rPr>
-              <a:t> and </a:t>
-            </a:r>
-            <a:r>
-              <a:rPr lang="sk-SK" b="0" i="0" dirty="0" err="1">
-                <a:solidFill>
-                  <a:srgbClr val="273239"/>
-                </a:solidFill>
-                <a:effectLst/>
-                <a:highlight>
-                  <a:srgbClr val="FFFFFF"/>
-                </a:highlight>
-                <a:latin typeface="Nunito" pitchFamily="2" charset="0"/>
-              </a:rPr>
-              <a:t>processing</a:t>
-            </a:r>
-            <a:r>
-              <a:rPr lang="sk-SK" b="0" i="0" dirty="0">
-                <a:solidFill>
-                  <a:srgbClr val="273239"/>
-                </a:solidFill>
-                <a:effectLst/>
-                <a:highlight>
-                  <a:srgbClr val="FFFFFF"/>
-                </a:highlight>
-                <a:latin typeface="Nunito" pitchFamily="2" charset="0"/>
-              </a:rPr>
-              <a:t>. </a:t>
             </a:r>
           </a:p>
           <a:p>
@@ -9069,15 +8976,6 @@
               <a:t> </a:t>
             </a:r>
             <a:endParaRPr lang="sk-SK" dirty="0"/>
-          </a:p>
-          <a:p>
-            <a:pPr marL="514350" indent="-514350">
-              <a:buAutoNum type="arabicPeriod"/>
-            </a:pPr>
-            <a:endParaRPr lang="en-US" dirty="0">
-              <a:ea typeface="Calibri"/>
-              <a:cs typeface="Calibri"/>
-            </a:endParaRPr>
           </a:p>
         </p:txBody>
       </p:sp>
